--- a/docs/playbook/PlayBook-Fashionably-Late.pptx
+++ b/docs/playbook/PlayBook-Fashionably-Late.pptx
@@ -3173,7 +3173,7 @@
                 </a:solidFill>
                 <a:latin typeface="Lato"/>
               </a:rPr>
-              <a:t>SMB PlayBook · davdunc · 15-minute 9-EMA × 34-SMA cross · example trade MSTR · August 27, 2026</a:t>
+              <a:t>A Trading As Buddies PlayBook · 15-minute 9-EMA × 34-SMA cross · example trade MSTR · August 27, 2026</a:t>
             </a:r>
           </a:p>
         </p:txBody>
@@ -3212,7 +3212,7 @@
                 </a:solidFill>
                 <a:latin typeface="Lato"/>
               </a:rPr>
-              <a:t>Hypothetical backtest results on Massive.com minute data; simulated trades were not executed and do not reflect slippage, commissions or liquidity except where stated. Not investment advice. PlayBook format after SMB Training.</a:t>
+              <a:t>Hypothetical backtest results on Massive.com minute data; simulated trades were not executed and do not reflect slippage, commissions or liquidity except where stated. Not investment advice. Trading As Buddies · github.com/TradingAsBuddies/DAS-hotkeys · PlayBook format after SMB Training (not affiliated).</a:t>
             </a:r>
           </a:p>
         </p:txBody>
@@ -3415,7 +3415,7 @@
                 </a:solidFill>
                 <a:latin typeface="Lato"/>
               </a:rPr>
-              <a:t>•  Correction 2026-09-27</a:t>
+              <a:t>•  How to start</a:t>
             </a:r>
             <a:r>
               <a:rPr sz="1500">
@@ -3424,7 +3424,7 @@
                 </a:solidFill>
                 <a:latin typeface="Lato"/>
               </a:rPr>
-              <a:t> an earlier figure of +292R included 387 entries at the 09:30 open on a cross printed on the prior day's last bar; those are a different trade and are removed here.</a:t>
+              <a:t> trade it at 1R in simulation; half the trades scratch at breakeven by design, and one in ten pays for everything.</a:t>
             </a:r>
           </a:p>
         </p:txBody>
@@ -3559,7 +3559,7 @@
                 </a:solidFill>
                 <a:latin typeface="Lato"/>
               </a:rPr>
-              <a:t>Hypothetical backtest results on Massive.com minute data; simulated trades were not executed and do not reflect slippage, commissions or liquidity except where stated. Not investment advice. PlayBook format after SMB Training.</a:t>
+              <a:t>Hypothetical backtest results on Massive.com minute data; simulated trades were not executed and do not reflect slippage, commissions or liquidity except where stated. Not investment advice. Trading As Buddies · github.com/TradingAsBuddies/DAS-hotkeys · PlayBook format after SMB Training (not affiliated).</a:t>
             </a:r>
           </a:p>
         </p:txBody>
@@ -3637,7 +3637,7 @@
                 </a:solidFill>
                 <a:latin typeface="Lato"/>
               </a:rPr>
-              <a:t>•  Driver</a:t>
+              <a:t>•  Chart</a:t>
             </a:r>
             <a:r>
               <a:rPr sz="1300">
@@ -3646,7 +3646,7 @@
                 </a:solidFill>
                 <a:latin typeface="Lato"/>
               </a:rPr>
-              <a:t> tools/fl_forward_test.py reads the DAS gameplan file, evaluates completed bars, injects entries through the CMD API into montage1, verifies every injection and halts on a lost window name.</a:t>
+              <a:t> 15-minute, regular hours only, 9-EMA and 34-SMA, volume with a 20-bar average. The cross must be visible on this chart, not on a 1-minute chart.</a:t>
             </a:r>
           </a:p>
           <a:p>
@@ -3662,7 +3662,7 @@
                 </a:solidFill>
                 <a:latin typeface="Lato"/>
               </a:rPr>
-              <a:t>•  Scripts</a:t>
+              <a:t>•  Entry</a:t>
             </a:r>
             <a:r>
               <a:rPr sz="1300">
@@ -3671,7 +3671,7 @@
                 </a:solidFill>
                 <a:latin typeface="Lato"/>
               </a:rPr>
-              <a:t> 20-fl-long.das / 21-fl-short.das place the entry with the 1.5×ATR stop; 22-fl-flatten.das closes by side and quantity; 00 loads the desktop.</a:t>
+              <a:t> market order at the 09:45 (or later) bar open, with a stop 0.75×ATR away entered at the same time. In DAS Trader Pro this is one hotkey; open-source scripts are in the repo (scripts/20-fl-long.das, 21-fl-short.das).</a:t>
             </a:r>
           </a:p>
           <a:p>
@@ -3687,7 +3687,7 @@
                 </a:solidFill>
                 <a:latin typeface="Lato"/>
               </a:rPr>
-              <a:t>•  Harness</a:t>
+              <a:t>•  Breakeven</a:t>
             </a:r>
             <a:r>
               <a:rPr sz="1300">
@@ -3696,7 +3696,7 @@
                 </a:solidFill>
                 <a:latin typeface="Lato"/>
               </a:rPr>
-              <a:t> tools/das_script_test.py runs, checks and dismisses script errors over the CMD API; docs/CMD-API-TESTING.md.</a:t>
+              <a:t> after the first completed bar shows +0.5R, move the stop to entry. A stop-order update or a chart alert both work.</a:t>
             </a:r>
           </a:p>
           <a:p>
@@ -3712,7 +3712,7 @@
                 </a:solidFill>
                 <a:latin typeface="Lato"/>
               </a:rPr>
-              <a:t>•  Backtest</a:t>
+              <a:t>•  Breadth</a:t>
             </a:r>
             <a:r>
               <a:rPr sz="1300">
@@ -3721,7 +3721,7 @@
                 </a:solidFill>
                 <a:latin typeface="Lato"/>
               </a:rPr>
-              <a:t> backtest/backtest_fl_week.py on Massive flat files; gate fixed 2026-09-27 (entry-bar time, no prior-day crosses).</a:t>
+              <a:t> keep $VOLD, $TICK and $ADD on screen at the cross; the side must agree with $VOLD.</a:t>
             </a:r>
           </a:p>
           <a:p>
@@ -3737,7 +3737,7 @@
                 </a:solidFill>
                 <a:latin typeface="Lato"/>
               </a:rPr>
-              <a:t>•  Still to build</a:t>
+              <a:t>•  Backtest</a:t>
             </a:r>
             <a:r>
               <a:rPr sz="1300">
@@ -3746,7 +3746,7 @@
                 </a:solidFill>
                 <a:latin typeface="Lato"/>
               </a:rPr>
-              <a:t> --bar-minutes 15 mode in the driver, breakeven order update through %OrderAct, entry window 09:45–11:00, single-stock filter from the gameplan.</a:t>
+              <a:t> backtest/backtest_fl_week.py in the repo reproduces every number here from Massive.com (Polygon) flat files; report in docs/forward-tests/fl-3y-2023-2026.md.</a:t>
             </a:r>
           </a:p>
           <a:p>
@@ -3762,7 +3762,7 @@
                 </a:solidFill>
                 <a:latin typeface="Lato"/>
               </a:rPr>
-              <a:t>•  Lesson from 09-25</a:t>
+              <a:t>•  Safety</a:t>
             </a:r>
             <a:r>
               <a:rPr sz="1300">
@@ -3771,7 +3771,7 @@
                 </a:solidFill>
                 <a:latin typeface="Lato"/>
               </a:rPr>
-              <a:t> name montage1 by hand and File → Save Desktop; the driver now refuses to trade a window it cannot verify.</a:t>
+              <a:t> simulation first at 1R; the rule is only as good as your stop fills, and those are yours to measure.</a:t>
             </a:r>
           </a:p>
         </p:txBody>
@@ -3906,7 +3906,7 @@
                 </a:solidFill>
                 <a:latin typeface="Lato"/>
               </a:rPr>
-              <a:t>Hypothetical backtest results on Massive.com minute data; simulated trades were not executed and do not reflect slippage, commissions or liquidity except where stated. Not investment advice. PlayBook format after SMB Training.</a:t>
+              <a:t>Hypothetical backtest results on Massive.com minute data; simulated trades were not executed and do not reflect slippage, commissions or liquidity except where stated. Not investment advice. Trading As Buddies · github.com/TradingAsBuddies/DAS-hotkeys · PlayBook format after SMB Training (not affiliated).</a:t>
             </a:r>
           </a:p>
         </p:txBody>
@@ -4034,7 +4034,7 @@
                 </a:solidFill>
                 <a:latin typeface="Lato"/>
               </a:rPr>
-              <a:t>•  The gate error</a:t>
+              <a:t>•  Check your backtest against a chart</a:t>
             </a:r>
             <a:r>
               <a:rPr sz="1200">
@@ -4043,7 +4043,7 @@
                 </a:solidFill>
                 <a:latin typeface="Lato"/>
               </a:rPr>
-              <a:t> until today the backtest let a cross on yesterday's last bar be bought at the open. Those 387 trades made +242R and are a different, untested idea (see the report). Removing them leaves +201R.</a:t>
+              <a:t> an earlier run let a cross on the prior day's closing bar be bought at the open, which inflated the result by 90R. Those overnight trades are a different, untested idea.</a:t>
             </a:r>
           </a:p>
           <a:p>
@@ -4118,7 +4118,7 @@
                 </a:solidFill>
                 <a:latin typeface="Lato"/>
               </a:rPr>
-              <a:t> driver flags for the 15-minute rule, breakeven via %OrderAct, walk-forward on the entry window, and a separate test of the overnight cross.</a:t>
+              <a:t> measure live stop fills in simulation, walk-forward the entry window, and test the overnight cross as its own setup.</a:t>
             </a:r>
           </a:p>
         </p:txBody>
@@ -4277,7 +4277,7 @@
                 </a:solidFill>
                 <a:latin typeface="Lato"/>
               </a:rPr>
-              <a:t>Hypothetical backtest results on Massive.com minute data; simulated trades were not executed and do not reflect slippage, commissions or liquidity except where stated. Not investment advice. PlayBook format after SMB Training.</a:t>
+              <a:t>Hypothetical backtest results on Massive.com minute data; simulated trades were not executed and do not reflect slippage, commissions or liquidity except where stated. Not investment advice. Trading As Buddies · github.com/TradingAsBuddies/DAS-hotkeys · PlayBook format after SMB Training (not affiliated).</a:t>
             </a:r>
           </a:p>
         </p:txBody>
@@ -4537,7 +4537,7 @@
                           </a:solidFill>
                           <a:latin typeface="Lato"/>
                         </a:rPr>
-                        <a:t>1R = the planned stop distance × shares = $75 in SIM</a:t>
+                        <a:t>1R = your risk per trade = planned stop distance × shares</a:t>
                       </a:r>
                     </a:p>
                   </a:txBody>
@@ -4993,7 +4993,7 @@
                 </a:solidFill>
                 <a:latin typeface="Lato"/>
               </a:rPr>
-              <a:t>Hypothetical backtest results on Massive.com minute data; simulated trades were not executed and do not reflect slippage, commissions or liquidity except where stated. Not investment advice. PlayBook format after SMB Training.</a:t>
+              <a:t>Hypothetical backtest results on Massive.com minute data; simulated trades were not executed and do not reflect slippage, commissions or liquidity except where stated. Not investment advice. Trading As Buddies · github.com/TradingAsBuddies/DAS-hotkeys · PlayBook format after SMB Training (not affiliated).</a:t>
             </a:r>
           </a:p>
         </p:txBody>
@@ -5457,7 +5457,7 @@
                           </a:solidFill>
                           <a:latin typeface="Lato"/>
                         </a:rPr>
-                        <a:t>Explicit and backtested; the gate error shows how a definition can drift from the chart.</a:t>
+                        <a:t>Explicit and backtested; the rule text was checked against plotted trades.</a:t>
                       </a:r>
                     </a:p>
                   </a:txBody>
@@ -5639,7 +5639,7 @@
                           </a:solidFill>
                           <a:latin typeface="Lato"/>
                         </a:rPr>
-                        <a:t>8</a:t>
+                        <a:t>7</a:t>
                       </a:r>
                     </a:p>
                   </a:txBody>
@@ -5661,7 +5661,7 @@
                           </a:solidFill>
                           <a:latin typeface="Lato"/>
                         </a:rPr>
-                        <a:t>Driver, scripts, harness and backtester exist and were exercised live; 15-minute driver mode pending.</a:t>
+                        <a:t>Open-source DAS scripts and backtester; entry and stop are one hotkey; breakeven update is manual or scripted.</a:t>
                       </a:r>
                     </a:p>
                   </a:txBody>
@@ -5729,7 +5729,7 @@
                           </a:solidFill>
                           <a:latin typeface="Lato"/>
                         </a:rPr>
-                        <a:t>Two live days reviewed, both failures diagnosed to cause; corrections shipped as releases.</a:t>
+                        <a:t>Live trials reviewed to cause, backtest checked against the chart, corrections published.</a:t>
                       </a:r>
                     </a:p>
                   </a:txBody>
@@ -5874,7 +5874,7 @@
                 </a:solidFill>
                 <a:latin typeface="Lato"/>
               </a:rPr>
-              <a:t>Hypothetical backtest results on Massive.com minute data; simulated trades were not executed and do not reflect slippage, commissions or liquidity except where stated. Not investment advice. PlayBook format after SMB Training.</a:t>
+              <a:t>Hypothetical backtest results on Massive.com minute data; simulated trades were not executed and do not reflect slippage, commissions or liquidity except where stated. Not investment advice. Trading As Buddies · github.com/TradingAsBuddies/DAS-hotkeys · PlayBook format after SMB Training (not affiliated).</a:t>
             </a:r>
           </a:p>
         </p:txBody>
@@ -6111,7 +6111,7 @@
                 </a:solidFill>
                 <a:latin typeface="Lato"/>
               </a:rPr>
-              <a:t>Hypothetical backtest results on Massive.com minute data; simulated trades were not executed and do not reflect slippage, commissions or liquidity except where stated. Not investment advice. PlayBook format after SMB Training.</a:t>
+              <a:t>Hypothetical backtest results on Massive.com minute data; simulated trades were not executed and do not reflect slippage, commissions or liquidity except where stated. Not investment advice. Trading As Buddies · github.com/TradingAsBuddies/DAS-hotkeys · PlayBook format after SMB Training (not affiliated).</a:t>
             </a:r>
           </a:p>
         </p:txBody>
@@ -6348,7 +6348,7 @@
                 </a:solidFill>
                 <a:latin typeface="Lato"/>
               </a:rPr>
-              <a:t>Hypothetical backtest results on Massive.com minute data; simulated trades were not executed and do not reflect slippage, commissions or liquidity except where stated. Not investment advice. PlayBook format after SMB Training.</a:t>
+              <a:t>Hypothetical backtest results on Massive.com minute data; simulated trades were not executed and do not reflect slippage, commissions or liquidity except where stated. Not investment advice. Trading As Buddies · github.com/TradingAsBuddies/DAS-hotkeys · PlayBook format after SMB Training (not affiliated).</a:t>
             </a:r>
           </a:p>
         </p:txBody>
@@ -6426,7 +6426,7 @@
                 </a:solidFill>
                 <a:latin typeface="Lato"/>
               </a:rPr>
-              <a:t>•  Gameplan name</a:t>
+              <a:t>•  In-play name</a:t>
             </a:r>
             <a:r>
               <a:rPr sz="1400">
@@ -6435,7 +6435,7 @@
                 </a:solidFill>
                 <a:latin typeface="Lato"/>
               </a:rPr>
-              <a:t> MSTR was on the in-play list; FL is only run on the day's gameplan tickers, single stocks only.</a:t>
+              <a:t> MSTR was on the morning in-play list. Run FL only on that day's in-play single stocks; it is not a scan of the whole market.</a:t>
             </a:r>
           </a:p>
           <a:p>
@@ -6510,7 +6510,7 @@
                 </a:solidFill>
                 <a:latin typeface="Lato"/>
               </a:rPr>
-              <a:t> the 16 single stocks of the gameplans; the seven ETFs and commodities lost money under this rule and are excluded.</a:t>
+              <a:t> the single stocks from the morning lists (16 names in the test); the seven ETFs and commodities lost money under this rule and are excluded.</a:t>
             </a:r>
           </a:p>
         </p:txBody>
@@ -7303,7 +7303,7 @@
                 </a:solidFill>
                 <a:latin typeface="Lato"/>
               </a:rPr>
-              <a:t>Hypothetical backtest results on Massive.com minute data; simulated trades were not executed and do not reflect slippage, commissions or liquidity except where stated. Not investment advice. PlayBook format after SMB Training.</a:t>
+              <a:t>Hypothetical backtest results on Massive.com minute data; simulated trades were not executed and do not reflect slippage, commissions or liquidity except where stated. Not investment advice. Trading As Buddies · github.com/TradingAsBuddies/DAS-hotkeys · PlayBook format after SMB Training (not affiliated).</a:t>
             </a:r>
           </a:p>
         </p:txBody>
@@ -7501,7 +7501,7 @@
                 </a:solidFill>
                 <a:latin typeface="Lato"/>
               </a:rPr>
-              <a:t>Hypothetical backtest results on Massive.com minute data; simulated trades were not executed and do not reflect slippage, commissions or liquidity except where stated. Not investment advice. PlayBook format after SMB Training.</a:t>
+              <a:t>Hypothetical backtest results on Massive.com minute data; simulated trades were not executed and do not reflect slippage, commissions or liquidity except where stated. Not investment advice. Trading As Buddies · github.com/TradingAsBuddies/DAS-hotkeys · PlayBook format after SMB Training (not affiliated).</a:t>
             </a:r>
           </a:p>
         </p:txBody>
@@ -7699,7 +7699,7 @@
                 </a:solidFill>
                 <a:latin typeface="Lato"/>
               </a:rPr>
-              <a:t>Hypothetical backtest results on Massive.com minute data; simulated trades were not executed and do not reflect slippage, commissions or liquidity except where stated. Not investment advice. PlayBook format after SMB Training.</a:t>
+              <a:t>Hypothetical backtest results on Massive.com minute data; simulated trades were not executed and do not reflect slippage, commissions or liquidity except where stated. Not investment advice. Trading As Buddies · github.com/TradingAsBuddies/DAS-hotkeys · PlayBook format after SMB Training (not affiliated).</a:t>
             </a:r>
           </a:p>
         </p:txBody>
@@ -7861,7 +7861,7 @@
                 </a:solidFill>
                 <a:latin typeface="Lato"/>
               </a:rPr>
-              <a:t> 0.75 × ATR(14) of the 15-minute chart, sized as if it were 1.5×ATR (the SIM convention), 1R = $75 SIM / $28 live.</a:t>
+              <a:t> 0.75 × ATR(14) of the 15-minute chart. Size = 1R ÷ (1.5 × ATR), so the position is half what the stop alone would allow; 1R is the amount you risk per trade.</a:t>
             </a:r>
           </a:p>
           <a:p>
@@ -7961,7 +7961,7 @@
                 </a:solidFill>
                 <a:latin typeface="Lato"/>
               </a:rPr>
-              <a:t> the driver suppresses a signal whose side disagrees with $VOLD; keep it, it filtered direction correctly on 09-25.</a:t>
+              <a:t> skip a signal whose side disagrees with the sign of $VOLD (NYSE up-volume minus down-volume) at the time of the cross.</a:t>
             </a:r>
           </a:p>
         </p:txBody>
@@ -8096,7 +8096,7 @@
                 </a:solidFill>
                 <a:latin typeface="Lato"/>
               </a:rPr>
-              <a:t>Hypothetical backtest results on Massive.com minute data; simulated trades were not executed and do not reflect slippage, commissions or liquidity except where stated. Not investment advice. PlayBook format after SMB Training.</a:t>
+              <a:t>Hypothetical backtest results on Massive.com minute data; simulated trades were not executed and do not reflect slippage, commissions or liquidity except where stated. Not investment advice. Trading As Buddies · github.com/TradingAsBuddies/DAS-hotkeys · PlayBook format after SMB Training (not affiliated).</a:t>
             </a:r>
           </a:p>
         </p:txBody>
@@ -8423,7 +8423,7 @@
                           </a:solidFill>
                           <a:latin typeface="Lato"/>
                         </a:rPr>
-                        <a:t>open of the next bar + 0.15 slip; 54 shares</a:t>
+                        <a:t>open of the next bar + 0.15 slip; shares = 1R ÷ (1.5 × ATR)</a:t>
                       </a:r>
                     </a:p>
                   </a:txBody>
@@ -8991,7 +8991,7 @@
                 </a:solidFill>
                 <a:latin typeface="Lato"/>
               </a:rPr>
-              <a:t>Hypothetical backtest results on Massive.com minute data; simulated trades were not executed and do not reflect slippage, commissions or liquidity except where stated. Not investment advice. PlayBook format after SMB Training.</a:t>
+              <a:t>Hypothetical backtest results on Massive.com minute data; simulated trades were not executed and do not reflect slippage, commissions or liquidity except where stated. Not investment advice. Trading As Buddies · github.com/TradingAsBuddies/DAS-hotkeys · PlayBook format after SMB Training (not affiliated).</a:t>
             </a:r>
           </a:p>
         </p:txBody>
@@ -9078,7 +9078,7 @@
                 </a:solidFill>
                 <a:latin typeface="Lato"/>
               </a:rPr>
-              <a:t> the cross bar's volume must be followed; the 50/2 rule from the LGCL review (each of the next two bars at least half the cross bar's volume) is the tape version of the 1.5× filter.</a:t>
+              <a:t> the cross bar's volume must be followed. The 50/2 rule: each of the next two bars prints at least half the cross bar's volume, or exit at that bar's close and do not re-enter on the same signal.</a:t>
             </a:r>
           </a:p>
           <a:p>

--- a/docs/playbook/PlayBook-Fashionably-Late.pptx
+++ b/docs/playbook/PlayBook-Fashionably-Late.pptx
@@ -3349,7 +3349,7 @@
                 </a:solidFill>
                 <a:latin typeface="Lato"/>
               </a:rPr>
-              <a:t> single stocks from the gameplan; no ETFs or commodities.</a:t>
+              <a:t> single stocks from the morning in-play list; no ETFs or commodities.</a:t>
             </a:r>
           </a:p>
           <a:p>
@@ -5253,7 +5253,7 @@
                           </a:solidFill>
                           <a:latin typeface="Lato"/>
                         </a:rPr>
-                        <a:t>Gameplan names only; no catalyst or news scoring yet.</a:t>
+                        <a:t>In-play names only; no catalyst or news scoring yet.</a:t>
                       </a:r>
                     </a:p>
                   </a:txBody>

--- a/docs/playbook/PlayBook-Fashionably-Late.pptx
+++ b/docs/playbook/PlayBook-Fashionably-Late.pptx
@@ -18,6 +18,7 @@
     <p:sldId id="266" r:id="rId17"/>
     <p:sldId id="267" r:id="rId18"/>
     <p:sldId id="268" r:id="rId19"/>
+    <p:sldId id="269" r:id="rId20"/>
   </p:sldIdLst>
   <p:sldSz cx="12191695" cy="6858000" type="screen4x3"/>
   <p:notesSz cx="6858000" cy="9144000"/>
@@ -3349,7 +3350,7 @@
                 </a:solidFill>
                 <a:latin typeface="Lato"/>
               </a:rPr>
-              <a:t> single stocks from the morning in-play list; no ETFs or commodities.</a:t>
+              <a:t> single stocks from the morning in-play list; no ETFs or commodities. Prefer a name with an earnings release or 8-K in the prior 24 hours: those trades earn four times as much per unit of risk.</a:t>
             </a:r>
           </a:p>
           <a:p>
@@ -3481,7 +3482,7 @@
                 </a:solidFill>
                 <a:latin typeface="Lato"/>
               </a:rPr>
-              <a:t>TECHNOLOGY</a:t>
+              <a:t>READING THE TAPE</a:t>
             </a:r>
           </a:p>
         </p:txBody>
@@ -3520,7 +3521,7 @@
                 </a:solidFill>
                 <a:latin typeface="Lato"/>
               </a:rPr>
-              <a:t>Built and tested against DAS on the paper account</a:t>
+              <a:t>What to watch on the cross bar and the bar after it</a:t>
             </a:r>
           </a:p>
         </p:txBody>
@@ -3637,7 +3638,7 @@
                 </a:solidFill>
                 <a:latin typeface="Lato"/>
               </a:rPr>
-              <a:t>•  Chart</a:t>
+              <a:t>•  Volume persistence</a:t>
             </a:r>
             <a:r>
               <a:rPr sz="1300">
@@ -3646,7 +3647,7 @@
                 </a:solidFill>
                 <a:latin typeface="Lato"/>
               </a:rPr>
-              <a:t> 15-minute, regular hours only, 9-EMA and 34-SMA, volume with a 20-bar average. The cross must be visible on this chart, not on a 1-minute chart.</a:t>
+              <a:t> the cross bar's volume must be followed. The 50/2 rule: each of the next two bars prints at least half the cross bar's volume, or exit at that bar's close and do not re-enter on the same signal.</a:t>
             </a:r>
           </a:p>
           <a:p>
@@ -3662,7 +3663,7 @@
                 </a:solidFill>
                 <a:latin typeface="Lato"/>
               </a:rPr>
-              <a:t>•  Entry</a:t>
+              <a:t>•  The 09:45 open</a:t>
             </a:r>
             <a:r>
               <a:rPr sz="1300">
@@ -3671,7 +3672,7 @@
                 </a:solidFill>
                 <a:latin typeface="Lato"/>
               </a:rPr>
-              <a:t> market order at the 09:45 (or later) bar open, with a stop 0.75×ATR away entered at the same time. In DAS Trader Pro this is one hotkey; open-source scripts are in the repo (scripts/20-fl-long.das, 21-fl-short.das).</a:t>
+              <a:t> the entry is at the market; a wide spread or a print far from the 09:45 15-minute open is the slippage the backtest does not model.</a:t>
             </a:r>
           </a:p>
           <a:p>
@@ -3687,7 +3688,7 @@
                 </a:solidFill>
                 <a:latin typeface="Lato"/>
               </a:rPr>
-              <a:t>•  Breakeven</a:t>
+              <a:t>•  First bar after entry</a:t>
             </a:r>
             <a:r>
               <a:rPr sz="1300">
@@ -3696,7 +3697,7 @@
                 </a:solidFill>
                 <a:latin typeface="Lato"/>
               </a:rPr>
-              <a:t> after the first completed bar shows +0.5R, move the stop to entry. A stop-order update or a chart alert both work.</a:t>
+              <a:t> +0.5R moves the stop to breakeven. On the tape that is the bar that has to hold above the 9-EMA; if it closes back below, the scratch is coming.</a:t>
             </a:r>
           </a:p>
           <a:p>
@@ -3712,7 +3713,7 @@
                 </a:solidFill>
                 <a:latin typeface="Lato"/>
               </a:rPr>
-              <a:t>•  Breadth</a:t>
+              <a:t>•  Level to watch</a:t>
             </a:r>
             <a:r>
               <a:rPr sz="1300">
@@ -3721,7 +3722,7 @@
                 </a:solidFill>
                 <a:latin typeface="Lato"/>
               </a:rPr>
-              <a:t> keep $VOLD, $TICK and $ADD on screen at the cross; the side must agree with $VOLD.</a:t>
+              <a:t> the entry price. After breakeven the trade is free; the runner is the one that never revisits it.</a:t>
             </a:r>
           </a:p>
           <a:p>
@@ -3737,7 +3738,7 @@
                 </a:solidFill>
                 <a:latin typeface="Lato"/>
               </a:rPr>
-              <a:t>•  Backtest</a:t>
+              <a:t>•  Breadth</a:t>
             </a:r>
             <a:r>
               <a:rPr sz="1300">
@@ -3746,32 +3747,7 @@
                 </a:solidFill>
                 <a:latin typeface="Lato"/>
               </a:rPr>
-              <a:t> backtest/backtest_fl_week.py in the repo reproduces every number here from Massive.com (Polygon) flat files; report in docs/forward-tests/fl-3y-2023-2026.md.</a:t>
-            </a:r>
-          </a:p>
-          <a:p>
-            <a:pPr>
-              <a:spcAft>
-                <a:spcPts val="800"/>
-              </a:spcAft>
-            </a:pPr>
-            <a:r>
-              <a:rPr sz="1300" b="1">
-                <a:solidFill>
-                  <a:srgbClr val="1A1B26"/>
-                </a:solidFill>
-                <a:latin typeface="Lato"/>
-              </a:rPr>
-              <a:t>•  Safety</a:t>
-            </a:r>
-            <a:r>
-              <a:rPr sz="1300">
-                <a:solidFill>
-                  <a:srgbClr val="1A1B26"/>
-                </a:solidFill>
-                <a:latin typeface="Lato"/>
-              </a:rPr>
-              <a:t> simulation first at 1R; the rule is only as good as your stop fills, and those are yours to measure.</a:t>
+              <a:t> $VOLD sign must agree with the side at the cross; $TICK extremes against the trade at entry are a reason to wait one bar, not to skip.</a:t>
             </a:r>
           </a:p>
         </p:txBody>
@@ -3828,7 +3804,7 @@
                 </a:solidFill>
                 <a:latin typeface="Lato"/>
               </a:rPr>
-              <a:t>TRADE REVIEW</a:t>
+              <a:t>TECHNOLOGY</a:t>
             </a:r>
           </a:p>
         </p:txBody>
@@ -3867,7 +3843,7 @@
                 </a:solidFill>
                 <a:latin typeface="Lato"/>
               </a:rPr>
-              <a:t>What the three years say to do better</a:t>
+              <a:t>Built and tested against DAS on the paper account</a:t>
             </a:r>
           </a:p>
         </p:txBody>
@@ -3946,6 +3922,353 @@
                 <a:latin typeface="Lato"/>
               </a:rPr>
               <a:t>11</a:t>
+            </a:r>
+          </a:p>
+        </p:txBody>
+      </p:sp>
+      <p:sp>
+        <p:nvSpPr>
+          <p:cNvPr id="6" name="TextBox 5"/>
+          <p:cNvSpPr txBox="1"/>
+          <p:nvPr/>
+        </p:nvSpPr>
+        <p:spPr>
+          <a:xfrm>
+            <a:off x="457200" y="1371600"/>
+            <a:ext cx="11247120" cy="4846320"/>
+          </a:xfrm>
+          <a:prstGeom prst="rect">
+            <a:avLst/>
+          </a:prstGeom>
+          <a:noFill/>
+        </p:spPr>
+        <p:txBody>
+          <a:bodyPr wrap="square">
+            <a:spAutoFit/>
+          </a:bodyPr>
+          <a:lstStyle/>
+          <a:p>
+            <a:pPr>
+              <a:spcAft>
+                <a:spcPts val="800"/>
+              </a:spcAft>
+            </a:pPr>
+            <a:r>
+              <a:rPr sz="1300" b="1">
+                <a:solidFill>
+                  <a:srgbClr val="1A1B26"/>
+                </a:solidFill>
+                <a:latin typeface="Lato"/>
+              </a:rPr>
+              <a:t>•  Chart</a:t>
+            </a:r>
+            <a:r>
+              <a:rPr sz="1300">
+                <a:solidFill>
+                  <a:srgbClr val="1A1B26"/>
+                </a:solidFill>
+                <a:latin typeface="Lato"/>
+              </a:rPr>
+              <a:t> 15-minute, regular hours only, 9-EMA and 34-SMA, volume with a 20-bar average. The cross must be visible on this chart, not on a 1-minute chart.</a:t>
+            </a:r>
+          </a:p>
+          <a:p>
+            <a:pPr>
+              <a:spcAft>
+                <a:spcPts val="800"/>
+              </a:spcAft>
+            </a:pPr>
+            <a:r>
+              <a:rPr sz="1300" b="1">
+                <a:solidFill>
+                  <a:srgbClr val="1A1B26"/>
+                </a:solidFill>
+                <a:latin typeface="Lato"/>
+              </a:rPr>
+              <a:t>•  Entry</a:t>
+            </a:r>
+            <a:r>
+              <a:rPr sz="1300">
+                <a:solidFill>
+                  <a:srgbClr val="1A1B26"/>
+                </a:solidFill>
+                <a:latin typeface="Lato"/>
+              </a:rPr>
+              <a:t> market order at the 09:45 (or later) bar open, with a stop 0.75×ATR away entered at the same time. In DAS Trader Pro this is one hotkey; open-source scripts are in the repo (scripts/20-fl-long.das, 21-fl-short.das).</a:t>
+            </a:r>
+          </a:p>
+          <a:p>
+            <a:pPr>
+              <a:spcAft>
+                <a:spcPts val="800"/>
+              </a:spcAft>
+            </a:pPr>
+            <a:r>
+              <a:rPr sz="1300" b="1">
+                <a:solidFill>
+                  <a:srgbClr val="1A1B26"/>
+                </a:solidFill>
+                <a:latin typeface="Lato"/>
+              </a:rPr>
+              <a:t>•  Breakeven</a:t>
+            </a:r>
+            <a:r>
+              <a:rPr sz="1300">
+                <a:solidFill>
+                  <a:srgbClr val="1A1B26"/>
+                </a:solidFill>
+                <a:latin typeface="Lato"/>
+              </a:rPr>
+              <a:t> after the first completed bar shows +0.5R, move the stop to entry. A stop-order update or a chart alert both work.</a:t>
+            </a:r>
+          </a:p>
+          <a:p>
+            <a:pPr>
+              <a:spcAft>
+                <a:spcPts val="800"/>
+              </a:spcAft>
+            </a:pPr>
+            <a:r>
+              <a:rPr sz="1300" b="1">
+                <a:solidFill>
+                  <a:srgbClr val="1A1B26"/>
+                </a:solidFill>
+                <a:latin typeface="Lato"/>
+              </a:rPr>
+              <a:t>•  Breadth</a:t>
+            </a:r>
+            <a:r>
+              <a:rPr sz="1300">
+                <a:solidFill>
+                  <a:srgbClr val="1A1B26"/>
+                </a:solidFill>
+                <a:latin typeface="Lato"/>
+              </a:rPr>
+              <a:t> keep $VOLD, $TICK and $ADD on screen at the cross; the side must agree with $VOLD.</a:t>
+            </a:r>
+          </a:p>
+          <a:p>
+            <a:pPr>
+              <a:spcAft>
+                <a:spcPts val="800"/>
+              </a:spcAft>
+            </a:pPr>
+            <a:r>
+              <a:rPr sz="1300" b="1">
+                <a:solidFill>
+                  <a:srgbClr val="1A1B26"/>
+                </a:solidFill>
+                <a:latin typeface="Lato"/>
+              </a:rPr>
+              <a:t>•  Backtest</a:t>
+            </a:r>
+            <a:r>
+              <a:rPr sz="1300">
+                <a:solidFill>
+                  <a:srgbClr val="1A1B26"/>
+                </a:solidFill>
+                <a:latin typeface="Lato"/>
+              </a:rPr>
+              <a:t> backtest/backtest_fl_week.py in the repo reproduces every number here from Massive.com (Polygon) flat files; report in docs/forward-tests/fl-3y-2023-2026.md.</a:t>
+            </a:r>
+          </a:p>
+          <a:p>
+            <a:pPr>
+              <a:spcAft>
+                <a:spcPts val="800"/>
+              </a:spcAft>
+            </a:pPr>
+            <a:r>
+              <a:rPr sz="1300" b="1">
+                <a:solidFill>
+                  <a:srgbClr val="1A1B26"/>
+                </a:solidFill>
+                <a:latin typeface="Lato"/>
+              </a:rPr>
+              <a:t>•  Safety</a:t>
+            </a:r>
+            <a:r>
+              <a:rPr sz="1300">
+                <a:solidFill>
+                  <a:srgbClr val="1A1B26"/>
+                </a:solidFill>
+                <a:latin typeface="Lato"/>
+              </a:rPr>
+              <a:t> simulation first at 1R; the rule is only as good as your stop fills, and those are yours to measure.</a:t>
+            </a:r>
+          </a:p>
+        </p:txBody>
+      </p:sp>
+    </p:spTree>
+  </p:cSld>
+  <p:clrMapOvr>
+    <a:masterClrMapping/>
+  </p:clrMapOvr>
+</p:sld>
+</file>
+
+<file path=ppt/slides/slide12.xml><?xml version="1.0" encoding="utf-8"?>
+<p:sld xmlns:a="http://schemas.openxmlformats.org/drawingml/2006/main" xmlns:p="http://schemas.openxmlformats.org/presentationml/2006/main" xmlns:r="http://schemas.openxmlformats.org/officeDocument/2006/relationships">
+  <p:cSld>
+    <p:spTree>
+      <p:nvGrpSpPr>
+        <p:cNvPr id="1" name=""/>
+        <p:cNvGrpSpPr/>
+        <p:nvPr/>
+      </p:nvGrpSpPr>
+      <p:grpSpPr/>
+      <p:sp>
+        <p:nvSpPr>
+          <p:cNvPr id="2" name="TextBox 1"/>
+          <p:cNvSpPr txBox="1"/>
+          <p:nvPr/>
+        </p:nvSpPr>
+        <p:spPr>
+          <a:xfrm>
+            <a:off x="457200" y="274320"/>
+            <a:ext cx="11247120" cy="640080"/>
+          </a:xfrm>
+          <a:prstGeom prst="rect">
+            <a:avLst/>
+          </a:prstGeom>
+          <a:noFill/>
+        </p:spPr>
+        <p:txBody>
+          <a:bodyPr wrap="square">
+            <a:spAutoFit/>
+          </a:bodyPr>
+          <a:lstStyle/>
+          <a:p>
+            <a:pPr algn="l">
+              <a:spcAft>
+                <a:spcPts val="400"/>
+              </a:spcAft>
+            </a:pPr>
+            <a:r>
+              <a:rPr sz="2600" b="1">
+                <a:solidFill>
+                  <a:srgbClr val="1A1B26"/>
+                </a:solidFill>
+                <a:latin typeface="Lato"/>
+              </a:rPr>
+              <a:t>TRADE REVIEW</a:t>
+            </a:r>
+          </a:p>
+        </p:txBody>
+      </p:sp>
+      <p:sp>
+        <p:nvSpPr>
+          <p:cNvPr id="3" name="TextBox 2"/>
+          <p:cNvSpPr txBox="1"/>
+          <p:nvPr/>
+        </p:nvSpPr>
+        <p:spPr>
+          <a:xfrm>
+            <a:off x="457200" y="868680"/>
+            <a:ext cx="11247120" cy="365760"/>
+          </a:xfrm>
+          <a:prstGeom prst="rect">
+            <a:avLst/>
+          </a:prstGeom>
+          <a:noFill/>
+        </p:spPr>
+        <p:txBody>
+          <a:bodyPr wrap="square">
+            <a:spAutoFit/>
+          </a:bodyPr>
+          <a:lstStyle/>
+          <a:p>
+            <a:pPr algn="l">
+              <a:spcAft>
+                <a:spcPts val="400"/>
+              </a:spcAft>
+            </a:pPr>
+            <a:r>
+              <a:rPr sz="1200" b="0">
+                <a:solidFill>
+                  <a:srgbClr val="666666"/>
+                </a:solidFill>
+                <a:latin typeface="Lato"/>
+              </a:rPr>
+              <a:t>What the three years say to do better</a:t>
+            </a:r>
+          </a:p>
+        </p:txBody>
+      </p:sp>
+      <p:sp>
+        <p:nvSpPr>
+          <p:cNvPr id="4" name="TextBox 3"/>
+          <p:cNvSpPr txBox="1"/>
+          <p:nvPr/>
+        </p:nvSpPr>
+        <p:spPr>
+          <a:xfrm>
+            <a:off x="457200" y="6400800"/>
+            <a:ext cx="10515600" cy="365760"/>
+          </a:xfrm>
+          <a:prstGeom prst="rect">
+            <a:avLst/>
+          </a:prstGeom>
+          <a:noFill/>
+        </p:spPr>
+        <p:txBody>
+          <a:bodyPr wrap="square">
+            <a:spAutoFit/>
+          </a:bodyPr>
+          <a:lstStyle/>
+          <a:p>
+            <a:pPr algn="l">
+              <a:spcAft>
+                <a:spcPts val="400"/>
+              </a:spcAft>
+            </a:pPr>
+            <a:r>
+              <a:rPr sz="700" b="0">
+                <a:solidFill>
+                  <a:srgbClr val="666666"/>
+                </a:solidFill>
+                <a:latin typeface="Lato"/>
+              </a:rPr>
+              <a:t>Hypothetical backtest results on Massive.com minute data; simulated trades were not executed and do not reflect slippage, commissions or liquidity except where stated. Not investment advice. Trading As Buddies · github.com/TradingAsBuddies/DAS-hotkeys · PlayBook format after SMB Training (not affiliated).</a:t>
+            </a:r>
+          </a:p>
+        </p:txBody>
+      </p:sp>
+      <p:sp>
+        <p:nvSpPr>
+          <p:cNvPr id="5" name="TextBox 4"/>
+          <p:cNvSpPr txBox="1"/>
+          <p:nvPr/>
+        </p:nvSpPr>
+        <p:spPr>
+          <a:xfrm>
+            <a:off x="11247120" y="6400800"/>
+            <a:ext cx="548640" cy="365760"/>
+          </a:xfrm>
+          <a:prstGeom prst="rect">
+            <a:avLst/>
+          </a:prstGeom>
+          <a:noFill/>
+        </p:spPr>
+        <p:txBody>
+          <a:bodyPr wrap="square">
+            <a:spAutoFit/>
+          </a:bodyPr>
+          <a:lstStyle/>
+          <a:p>
+            <a:pPr algn="r">
+              <a:spcAft>
+                <a:spcPts val="400"/>
+              </a:spcAft>
+            </a:pPr>
+            <a:r>
+              <a:rPr sz="800" b="0">
+                <a:solidFill>
+                  <a:srgbClr val="666666"/>
+                </a:solidFill>
+                <a:latin typeface="Lato"/>
+              </a:rPr>
+              <a:t>12</a:t>
             </a:r>
           </a:p>
         </p:txBody>
@@ -4155,7 +4478,7 @@
 </p:sld>
 </file>
 
-<file path=ppt/slides/slide12.xml><?xml version="1.0" encoding="utf-8"?>
+<file path=ppt/slides/slide13.xml><?xml version="1.0" encoding="utf-8"?>
 <p:sld xmlns:a="http://schemas.openxmlformats.org/drawingml/2006/main" xmlns:p="http://schemas.openxmlformats.org/presentationml/2006/main" xmlns:r="http://schemas.openxmlformats.org/officeDocument/2006/relationships">
   <p:cSld>
     <p:spTree>
@@ -4316,7 +4639,7 @@
                 </a:solidFill>
                 <a:latin typeface="Lato"/>
               </a:rPr>
-              <a:t>12</a:t>
+              <a:t>13</a:t>
             </a:r>
           </a:p>
         </p:txBody>
@@ -4871,7 +5194,7 @@
 </p:sld>
 </file>
 
-<file path=ppt/slides/slide13.xml><?xml version="1.0" encoding="utf-8"?>
+<file path=ppt/slides/slide14.xml><?xml version="1.0" encoding="utf-8"?>
 <p:sld xmlns:a="http://schemas.openxmlformats.org/drawingml/2006/main" xmlns:p="http://schemas.openxmlformats.org/presentationml/2006/main" xmlns:r="http://schemas.openxmlformats.org/officeDocument/2006/relationships">
   <p:cSld>
     <p:spTree>
@@ -5032,7 +5355,7 @@
                 </a:solidFill>
                 <a:latin typeface="Lato"/>
               </a:rPr>
-              <a:t>13</a:t>
+              <a:t>14</a:t>
             </a:r>
           </a:p>
         </p:txBody>
@@ -5231,7 +5554,7 @@
                           </a:solidFill>
                           <a:latin typeface="Lato"/>
                         </a:rPr>
-                        <a:t>6</a:t>
+                        <a:t>8</a:t>
                       </a:r>
                     </a:p>
                   </a:txBody>
@@ -5253,7 +5576,7 @@
                           </a:solidFill>
                           <a:latin typeface="Lato"/>
                         </a:rPr>
-                        <a:t>In-play names only; no catalyst or news scoring yet.</a:t>
+                        <a:t>In-play names plus an EDGAR check; catalyst mornings carry the friction-adjusted edge.</a:t>
                       </a:r>
                     </a:p>
                   </a:txBody>
@@ -6511,6 +6834,31 @@
                 <a:latin typeface="Lato"/>
               </a:rPr>
               <a:t> the single stocks from the morning lists (16 names in the test); the seven ETFs and commodities lost money under this rule and are excluded.</a:t>
+            </a:r>
+          </a:p>
+          <a:p>
+            <a:pPr>
+              <a:spcAft>
+                <a:spcPts val="800"/>
+              </a:spcAft>
+            </a:pPr>
+            <a:r>
+              <a:rPr sz="1400" b="1">
+                <a:solidFill>
+                  <a:srgbClr val="1A1B26"/>
+                </a:solidFill>
+                <a:latin typeface="Lato"/>
+              </a:rPr>
+              <a:t>•  Catalyst</a:t>
+            </a:r>
+            <a:r>
+              <a:rPr sz="1400">
+                <a:solidFill>
+                  <a:srgbClr val="1A1B26"/>
+                </a:solidFill>
+                <a:latin typeface="Lato"/>
+              </a:rPr>
+              <a:t> MSTR had no filing that morning, which is the common case (90% of trades). Earnings and 8-K mornings are 9% of the trades and 30% of the profit, +0.29R a trade against +0.07R; after 5¢ of stop slippage they are three quarters of what is left.</a:t>
             </a:r>
           </a:p>
         </p:txBody>
@@ -7621,7 +7969,7 @@
                 </a:solidFill>
                 <a:latin typeface="Lato"/>
               </a:rPr>
-              <a:t>TRADE STRATEGY</a:t>
+              <a:t>INTRADAY FUNDAMENTALS: CATALYSTS</a:t>
             </a:r>
           </a:p>
         </p:txBody>
@@ -7660,7 +8008,7 @@
                 </a:solidFill>
                 <a:latin typeface="Lato"/>
               </a:rPr>
-              <a:t>The rule, as backtested (backtest_fl_week.py --bar-minutes 15 --rth-only --warmup-days 4 --stop-mult 0.75 --size-mult 1.5 --be-after 0.5 --last-entry 11:00)</a:t>
+              <a:t>SEC EDGAR 8-K filings joined to every trade day · catalyst mornings are the richer trade and the friction-proof one</a:t>
             </a:r>
           </a:p>
         </p:txBody>
@@ -7743,16 +8091,40 @@
           </a:p>
         </p:txBody>
       </p:sp>
-      <p:sp>
-        <p:nvSpPr>
-          <p:cNvPr id="6" name="TextBox 5"/>
+      <p:pic>
+        <p:nvPicPr>
+          <p:cNvPr id="6" name="Picture 5" descr="fl_catalyst.png"/>
+          <p:cNvPicPr>
+            <a:picLocks noChangeAspect="1"/>
+          </p:cNvPicPr>
+          <p:nvPr/>
+        </p:nvPicPr>
+        <p:blipFill>
+          <a:blip r:embed="rId2"/>
+          <a:stretch>
+            <a:fillRect/>
+          </a:stretch>
+        </p:blipFill>
+        <p:spPr>
+          <a:xfrm>
+            <a:off x="457200" y="1325880"/>
+            <a:ext cx="10789920" cy="4119788"/>
+          </a:xfrm>
+          <a:prstGeom prst="rect">
+            <a:avLst/>
+          </a:prstGeom>
+        </p:spPr>
+      </p:pic>
+      <p:sp>
+        <p:nvSpPr>
+          <p:cNvPr id="7" name="TextBox 6"/>
           <p:cNvSpPr txBox="1"/>
           <p:nvPr/>
         </p:nvSpPr>
         <p:spPr>
           <a:xfrm>
-            <a:off x="457200" y="1371600"/>
-            <a:ext cx="11247120" cy="4846320"/>
+            <a:off x="457200" y="5486400"/>
+            <a:ext cx="11247120" cy="822960"/>
           </a:xfrm>
           <a:prstGeom prst="rect">
             <a:avLst/>
@@ -7765,203 +8137,19 @@
           </a:bodyPr>
           <a:lstStyle/>
           <a:p>
-            <a:pPr>
+            <a:pPr algn="l">
               <a:spcAft>
-                <a:spcPts val="800"/>
+                <a:spcPts val="400"/>
               </a:spcAft>
             </a:pPr>
             <a:r>
-              <a:rPr sz="1300" b="1">
-                <a:solidFill>
-                  <a:srgbClr val="1A1B26"/>
-                </a:solidFill>
-                <a:latin typeface="Lato"/>
-              </a:rPr>
-              <a:t>•  Chart</a:t>
-            </a:r>
-            <a:r>
-              <a:rPr sz="1300">
-                <a:solidFill>
-                  <a:srgbClr val="1A1B26"/>
-                </a:solidFill>
-                <a:latin typeface="Lato"/>
-              </a:rPr>
-              <a:t> 15-minute, regular hours only, 9-EMA and 34-SMA warm from four prior sessions.</a:t>
-            </a:r>
-          </a:p>
-          <a:p>
-            <a:pPr>
-              <a:spcAft>
-                <a:spcPts val="800"/>
-              </a:spcAft>
-            </a:pPr>
-            <a:r>
-              <a:rPr sz="1300" b="1">
-                <a:solidFill>
-                  <a:srgbClr val="1A1B26"/>
-                </a:solidFill>
-                <a:latin typeface="Lato"/>
-              </a:rPr>
-              <a:t>•  Signal</a:t>
-            </a:r>
-            <a:r>
-              <a:rPr sz="1300">
-                <a:solidFill>
-                  <a:srgbClr val="1A1B26"/>
-                </a:solidFill>
-                <a:latin typeface="Lato"/>
-              </a:rPr>
-              <a:t> a completed bar whose close moves the 9-EMA across the 34-SMA, with that bar's volume above 1.5× the average of the 20 bars before it. Crosses printed on a prior day's bar do not count.</a:t>
-            </a:r>
-          </a:p>
-          <a:p>
-            <a:pPr>
-              <a:spcAft>
-                <a:spcPts val="800"/>
-              </a:spcAft>
-            </a:pPr>
-            <a:r>
-              <a:rPr sz="1300" b="1">
-                <a:solidFill>
-                  <a:srgbClr val="1A1B26"/>
-                </a:solidFill>
-                <a:latin typeface="Lato"/>
-              </a:rPr>
-              <a:t>•  Entry</a:t>
-            </a:r>
-            <a:r>
-              <a:rPr sz="1300">
-                <a:solidFill>
-                  <a:srgbClr val="1A1B26"/>
-                </a:solidFill>
-                <a:latin typeface="Lato"/>
-              </a:rPr>
-              <a:t> market at the open of the next bar, 09:45 to 11:00 only. Two entries per name per day at most.</a:t>
-            </a:r>
-          </a:p>
-          <a:p>
-            <a:pPr>
-              <a:spcAft>
-                <a:spcPts val="800"/>
-              </a:spcAft>
-            </a:pPr>
-            <a:r>
-              <a:rPr sz="1300" b="1">
-                <a:solidFill>
-                  <a:srgbClr val="1A1B26"/>
-                </a:solidFill>
-                <a:latin typeface="Lato"/>
-              </a:rPr>
-              <a:t>•  Stop</a:t>
-            </a:r>
-            <a:r>
-              <a:rPr sz="1300">
-                <a:solidFill>
-                  <a:srgbClr val="1A1B26"/>
-                </a:solidFill>
-                <a:latin typeface="Lato"/>
-              </a:rPr>
-              <a:t> 0.75 × ATR(14) of the 15-minute chart. Size = 1R ÷ (1.5 × ATR), so the position is half what the stop alone would allow; 1R is the amount you risk per trade.</a:t>
-            </a:r>
-          </a:p>
-          <a:p>
-            <a:pPr>
-              <a:spcAft>
-                <a:spcPts val="800"/>
-              </a:spcAft>
-            </a:pPr>
-            <a:r>
-              <a:rPr sz="1300" b="1">
-                <a:solidFill>
-                  <a:srgbClr val="1A1B26"/>
-                </a:solidFill>
-                <a:latin typeface="Lato"/>
-              </a:rPr>
-              <a:t>•  Breakeven</a:t>
-            </a:r>
-            <a:r>
-              <a:rPr sz="1300">
-                <a:solidFill>
-                  <a:srgbClr val="1A1B26"/>
-                </a:solidFill>
-                <a:latin typeface="Lato"/>
-              </a:rPr>
-              <a:t> once a completed bar has shown +0.5R in favour, move the stop to entry.</a:t>
-            </a:r>
-          </a:p>
-          <a:p>
-            <a:pPr>
-              <a:spcAft>
-                <a:spcPts val="800"/>
-              </a:spcAft>
-            </a:pPr>
-            <a:r>
-              <a:rPr sz="1300" b="1">
-                <a:solidFill>
-                  <a:srgbClr val="1A1B26"/>
-                </a:solidFill>
-                <a:latin typeface="Lato"/>
-              </a:rPr>
-              <a:t>•  Exit</a:t>
-            </a:r>
-            <a:r>
-              <a:rPr sz="1300">
-                <a:solidFill>
-                  <a:srgbClr val="1A1B26"/>
-                </a:solidFill>
-                <a:latin typeface="Lato"/>
-              </a:rPr>
-              <a:t> hold to the close (flat at 15:55). No target, no partials: partial profit at +1R cut the three-year result by 85%.</a:t>
-            </a:r>
-          </a:p>
-          <a:p>
-            <a:pPr>
-              <a:spcAft>
-                <a:spcPts val="800"/>
-              </a:spcAft>
-            </a:pPr>
-            <a:r>
-              <a:rPr sz="1300" b="1">
-                <a:solidFill>
-                  <a:srgbClr val="1A1B26"/>
-                </a:solidFill>
-                <a:latin typeface="Lato"/>
-              </a:rPr>
-              <a:t>•  Do not</a:t>
-            </a:r>
-            <a:r>
-              <a:rPr sz="1300">
-                <a:solidFill>
-                  <a:srgbClr val="1A1B26"/>
-                </a:solidFill>
-                <a:latin typeface="Lato"/>
-              </a:rPr>
-              <a:t> trade the 1-minute cross (−7,680R over three years), enter after 11:00, or use a 9-EMA trail on 1-minute bars (−1,395R).</a:t>
-            </a:r>
-          </a:p>
-          <a:p>
-            <a:pPr>
-              <a:spcAft>
-                <a:spcPts val="800"/>
-              </a:spcAft>
-            </a:pPr>
-            <a:r>
-              <a:rPr sz="1300" b="1">
-                <a:solidFill>
-                  <a:srgbClr val="1A1B26"/>
-                </a:solidFill>
-                <a:latin typeface="Lato"/>
-              </a:rPr>
-              <a:t>•  Breadth gate</a:t>
-            </a:r>
-            <a:r>
-              <a:rPr sz="1300">
-                <a:solidFill>
-                  <a:srgbClr val="1A1B26"/>
-                </a:solidFill>
-                <a:latin typeface="Lato"/>
-              </a:rPr>
-              <a:t> skip a signal whose side disagrees with the sign of $VOLD (NYSE up-volume minus down-volume) at the time of the cross.</a:t>
+              <a:rPr sz="1100" b="0">
+                <a:solidFill>
+                  <a:srgbClr val="666666"/>
+                </a:solidFill>
+                <a:latin typeface="Lato"/>
+              </a:rPr>
+              <a:t>Earnings and other-8-K reaction days: 204 trades, +59R, +0.29R each, +48R after 5¢ of stop slippage. Every other day: 2,078 trades, +142R, +0.07R each, +17R after slippage. The chance that a random 204-trade subset does this well is under 1%.</a:t>
             </a:r>
           </a:p>
         </p:txBody>
@@ -8018,7 +8206,7 @@
                 </a:solidFill>
                 <a:latin typeface="Lato"/>
               </a:rPr>
-              <a:t>TRADE MANAGEMENT</a:t>
+              <a:t>TRADE STRATEGY</a:t>
             </a:r>
           </a:p>
         </p:txBody>
@@ -8057,7 +8245,7 @@
                 </a:solidFill>
                 <a:latin typeface="Lato"/>
               </a:rPr>
-              <a:t>MSTR 2026-08-27 as it was simulated</a:t>
+              <a:t>The rule, as backtested (backtest_fl_week.py --bar-minutes 15 --rth-only --warmup-days 4 --stop-mult 0.75 --size-mult 1.5 --be-after 0.5 --last-entry 11:00)</a:t>
             </a:r>
           </a:p>
         </p:txBody>
@@ -8136,6 +8324,428 @@
                 <a:latin typeface="Lato"/>
               </a:rPr>
               <a:t>8</a:t>
+            </a:r>
+          </a:p>
+        </p:txBody>
+      </p:sp>
+      <p:sp>
+        <p:nvSpPr>
+          <p:cNvPr id="6" name="TextBox 5"/>
+          <p:cNvSpPr txBox="1"/>
+          <p:nvPr/>
+        </p:nvSpPr>
+        <p:spPr>
+          <a:xfrm>
+            <a:off x="457200" y="1371600"/>
+            <a:ext cx="11247120" cy="4846320"/>
+          </a:xfrm>
+          <a:prstGeom prst="rect">
+            <a:avLst/>
+          </a:prstGeom>
+          <a:noFill/>
+        </p:spPr>
+        <p:txBody>
+          <a:bodyPr wrap="square">
+            <a:spAutoFit/>
+          </a:bodyPr>
+          <a:lstStyle/>
+          <a:p>
+            <a:pPr>
+              <a:spcAft>
+                <a:spcPts val="800"/>
+              </a:spcAft>
+            </a:pPr>
+            <a:r>
+              <a:rPr sz="1300" b="1">
+                <a:solidFill>
+                  <a:srgbClr val="1A1B26"/>
+                </a:solidFill>
+                <a:latin typeface="Lato"/>
+              </a:rPr>
+              <a:t>•  Chart</a:t>
+            </a:r>
+            <a:r>
+              <a:rPr sz="1300">
+                <a:solidFill>
+                  <a:srgbClr val="1A1B26"/>
+                </a:solidFill>
+                <a:latin typeface="Lato"/>
+              </a:rPr>
+              <a:t> 15-minute, regular hours only, 9-EMA and 34-SMA warm from four prior sessions.</a:t>
+            </a:r>
+          </a:p>
+          <a:p>
+            <a:pPr>
+              <a:spcAft>
+                <a:spcPts val="800"/>
+              </a:spcAft>
+            </a:pPr>
+            <a:r>
+              <a:rPr sz="1300" b="1">
+                <a:solidFill>
+                  <a:srgbClr val="1A1B26"/>
+                </a:solidFill>
+                <a:latin typeface="Lato"/>
+              </a:rPr>
+              <a:t>•  Signal</a:t>
+            </a:r>
+            <a:r>
+              <a:rPr sz="1300">
+                <a:solidFill>
+                  <a:srgbClr val="1A1B26"/>
+                </a:solidFill>
+                <a:latin typeface="Lato"/>
+              </a:rPr>
+              <a:t> a completed bar whose close moves the 9-EMA across the 34-SMA, with that bar's volume above 1.5× the average of the 20 bars before it. Crosses printed on a prior day's bar do not count.</a:t>
+            </a:r>
+          </a:p>
+          <a:p>
+            <a:pPr>
+              <a:spcAft>
+                <a:spcPts val="800"/>
+              </a:spcAft>
+            </a:pPr>
+            <a:r>
+              <a:rPr sz="1300" b="1">
+                <a:solidFill>
+                  <a:srgbClr val="1A1B26"/>
+                </a:solidFill>
+                <a:latin typeface="Lato"/>
+              </a:rPr>
+              <a:t>•  Catalyst</a:t>
+            </a:r>
+            <a:r>
+              <a:rPr sz="1300">
+                <a:solidFill>
+                  <a:srgbClr val="1A1B26"/>
+                </a:solidFill>
+                <a:latin typeface="Lato"/>
+              </a:rPr>
+              <a:t> when more signals fire than you can take, take the names with an earnings release or 8-K in the prior 24 hours first. Without a catalyst, take the trade only if your measured stop slippage is under two cents.</a:t>
+            </a:r>
+          </a:p>
+          <a:p>
+            <a:pPr>
+              <a:spcAft>
+                <a:spcPts val="800"/>
+              </a:spcAft>
+            </a:pPr>
+            <a:r>
+              <a:rPr sz="1300" b="1">
+                <a:solidFill>
+                  <a:srgbClr val="1A1B26"/>
+                </a:solidFill>
+                <a:latin typeface="Lato"/>
+              </a:rPr>
+              <a:t>•  Entry</a:t>
+            </a:r>
+            <a:r>
+              <a:rPr sz="1300">
+                <a:solidFill>
+                  <a:srgbClr val="1A1B26"/>
+                </a:solidFill>
+                <a:latin typeface="Lato"/>
+              </a:rPr>
+              <a:t> market at the open of the next bar, 09:45 to 11:00 only. Two entries per name per day at most.</a:t>
+            </a:r>
+          </a:p>
+          <a:p>
+            <a:pPr>
+              <a:spcAft>
+                <a:spcPts val="800"/>
+              </a:spcAft>
+            </a:pPr>
+            <a:r>
+              <a:rPr sz="1300" b="1">
+                <a:solidFill>
+                  <a:srgbClr val="1A1B26"/>
+                </a:solidFill>
+                <a:latin typeface="Lato"/>
+              </a:rPr>
+              <a:t>•  Stop</a:t>
+            </a:r>
+            <a:r>
+              <a:rPr sz="1300">
+                <a:solidFill>
+                  <a:srgbClr val="1A1B26"/>
+                </a:solidFill>
+                <a:latin typeface="Lato"/>
+              </a:rPr>
+              <a:t> 0.75 × ATR(14) of the 15-minute chart. Size = 1R ÷ (1.5 × ATR), so the position is half what the stop alone would allow; 1R is the amount you risk per trade.</a:t>
+            </a:r>
+          </a:p>
+          <a:p>
+            <a:pPr>
+              <a:spcAft>
+                <a:spcPts val="800"/>
+              </a:spcAft>
+            </a:pPr>
+            <a:r>
+              <a:rPr sz="1300" b="1">
+                <a:solidFill>
+                  <a:srgbClr val="1A1B26"/>
+                </a:solidFill>
+                <a:latin typeface="Lato"/>
+              </a:rPr>
+              <a:t>•  Breakeven</a:t>
+            </a:r>
+            <a:r>
+              <a:rPr sz="1300">
+                <a:solidFill>
+                  <a:srgbClr val="1A1B26"/>
+                </a:solidFill>
+                <a:latin typeface="Lato"/>
+              </a:rPr>
+              <a:t> once a completed bar has shown +0.5R in favour, move the stop to entry.</a:t>
+            </a:r>
+          </a:p>
+          <a:p>
+            <a:pPr>
+              <a:spcAft>
+                <a:spcPts val="800"/>
+              </a:spcAft>
+            </a:pPr>
+            <a:r>
+              <a:rPr sz="1300" b="1">
+                <a:solidFill>
+                  <a:srgbClr val="1A1B26"/>
+                </a:solidFill>
+                <a:latin typeface="Lato"/>
+              </a:rPr>
+              <a:t>•  Exit</a:t>
+            </a:r>
+            <a:r>
+              <a:rPr sz="1300">
+                <a:solidFill>
+                  <a:srgbClr val="1A1B26"/>
+                </a:solidFill>
+                <a:latin typeface="Lato"/>
+              </a:rPr>
+              <a:t> hold to the close (flat at 15:55). No target, no partials: partial profit at +1R cut the three-year result by 85%.</a:t>
+            </a:r>
+          </a:p>
+          <a:p>
+            <a:pPr>
+              <a:spcAft>
+                <a:spcPts val="800"/>
+              </a:spcAft>
+            </a:pPr>
+            <a:r>
+              <a:rPr sz="1300" b="1">
+                <a:solidFill>
+                  <a:srgbClr val="1A1B26"/>
+                </a:solidFill>
+                <a:latin typeface="Lato"/>
+              </a:rPr>
+              <a:t>•  Do not</a:t>
+            </a:r>
+            <a:r>
+              <a:rPr sz="1300">
+                <a:solidFill>
+                  <a:srgbClr val="1A1B26"/>
+                </a:solidFill>
+                <a:latin typeface="Lato"/>
+              </a:rPr>
+              <a:t> trade the 1-minute cross (−7,680R over three years), enter after 11:00, or use a 9-EMA trail on 1-minute bars (−1,395R).</a:t>
+            </a:r>
+          </a:p>
+          <a:p>
+            <a:pPr>
+              <a:spcAft>
+                <a:spcPts val="800"/>
+              </a:spcAft>
+            </a:pPr>
+            <a:r>
+              <a:rPr sz="1300" b="1">
+                <a:solidFill>
+                  <a:srgbClr val="1A1B26"/>
+                </a:solidFill>
+                <a:latin typeface="Lato"/>
+              </a:rPr>
+              <a:t>•  Breadth gate</a:t>
+            </a:r>
+            <a:r>
+              <a:rPr sz="1300">
+                <a:solidFill>
+                  <a:srgbClr val="1A1B26"/>
+                </a:solidFill>
+                <a:latin typeface="Lato"/>
+              </a:rPr>
+              <a:t> skip a signal whose side disagrees with the sign of $VOLD (NYSE up-volume minus down-volume) at the time of the cross.</a:t>
+            </a:r>
+          </a:p>
+        </p:txBody>
+      </p:sp>
+    </p:spTree>
+  </p:cSld>
+  <p:clrMapOvr>
+    <a:masterClrMapping/>
+  </p:clrMapOvr>
+</p:sld>
+</file>
+
+<file path=ppt/slides/slide9.xml><?xml version="1.0" encoding="utf-8"?>
+<p:sld xmlns:a="http://schemas.openxmlformats.org/drawingml/2006/main" xmlns:p="http://schemas.openxmlformats.org/presentationml/2006/main" xmlns:r="http://schemas.openxmlformats.org/officeDocument/2006/relationships">
+  <p:cSld>
+    <p:spTree>
+      <p:nvGrpSpPr>
+        <p:cNvPr id="1" name=""/>
+        <p:cNvGrpSpPr/>
+        <p:nvPr/>
+      </p:nvGrpSpPr>
+      <p:grpSpPr/>
+      <p:sp>
+        <p:nvSpPr>
+          <p:cNvPr id="2" name="TextBox 1"/>
+          <p:cNvSpPr txBox="1"/>
+          <p:nvPr/>
+        </p:nvSpPr>
+        <p:spPr>
+          <a:xfrm>
+            <a:off x="457200" y="274320"/>
+            <a:ext cx="11247120" cy="640080"/>
+          </a:xfrm>
+          <a:prstGeom prst="rect">
+            <a:avLst/>
+          </a:prstGeom>
+          <a:noFill/>
+        </p:spPr>
+        <p:txBody>
+          <a:bodyPr wrap="square">
+            <a:spAutoFit/>
+          </a:bodyPr>
+          <a:lstStyle/>
+          <a:p>
+            <a:pPr algn="l">
+              <a:spcAft>
+                <a:spcPts val="400"/>
+              </a:spcAft>
+            </a:pPr>
+            <a:r>
+              <a:rPr sz="2600" b="1">
+                <a:solidFill>
+                  <a:srgbClr val="1A1B26"/>
+                </a:solidFill>
+                <a:latin typeface="Lato"/>
+              </a:rPr>
+              <a:t>TRADE MANAGEMENT</a:t>
+            </a:r>
+          </a:p>
+        </p:txBody>
+      </p:sp>
+      <p:sp>
+        <p:nvSpPr>
+          <p:cNvPr id="3" name="TextBox 2"/>
+          <p:cNvSpPr txBox="1"/>
+          <p:nvPr/>
+        </p:nvSpPr>
+        <p:spPr>
+          <a:xfrm>
+            <a:off x="457200" y="868680"/>
+            <a:ext cx="11247120" cy="365760"/>
+          </a:xfrm>
+          <a:prstGeom prst="rect">
+            <a:avLst/>
+          </a:prstGeom>
+          <a:noFill/>
+        </p:spPr>
+        <p:txBody>
+          <a:bodyPr wrap="square">
+            <a:spAutoFit/>
+          </a:bodyPr>
+          <a:lstStyle/>
+          <a:p>
+            <a:pPr algn="l">
+              <a:spcAft>
+                <a:spcPts val="400"/>
+              </a:spcAft>
+            </a:pPr>
+            <a:r>
+              <a:rPr sz="1200" b="0">
+                <a:solidFill>
+                  <a:srgbClr val="666666"/>
+                </a:solidFill>
+                <a:latin typeface="Lato"/>
+              </a:rPr>
+              <a:t>MSTR 2026-08-27 as it was simulated</a:t>
+            </a:r>
+          </a:p>
+        </p:txBody>
+      </p:sp>
+      <p:sp>
+        <p:nvSpPr>
+          <p:cNvPr id="4" name="TextBox 3"/>
+          <p:cNvSpPr txBox="1"/>
+          <p:nvPr/>
+        </p:nvSpPr>
+        <p:spPr>
+          <a:xfrm>
+            <a:off x="457200" y="6400800"/>
+            <a:ext cx="10515600" cy="365760"/>
+          </a:xfrm>
+          <a:prstGeom prst="rect">
+            <a:avLst/>
+          </a:prstGeom>
+          <a:noFill/>
+        </p:spPr>
+        <p:txBody>
+          <a:bodyPr wrap="square">
+            <a:spAutoFit/>
+          </a:bodyPr>
+          <a:lstStyle/>
+          <a:p>
+            <a:pPr algn="l">
+              <a:spcAft>
+                <a:spcPts val="400"/>
+              </a:spcAft>
+            </a:pPr>
+            <a:r>
+              <a:rPr sz="700" b="0">
+                <a:solidFill>
+                  <a:srgbClr val="666666"/>
+                </a:solidFill>
+                <a:latin typeface="Lato"/>
+              </a:rPr>
+              <a:t>Hypothetical backtest results on Massive.com minute data; simulated trades were not executed and do not reflect slippage, commissions or liquidity except where stated. Not investment advice. Trading As Buddies · github.com/TradingAsBuddies/DAS-hotkeys · PlayBook format after SMB Training (not affiliated).</a:t>
+            </a:r>
+          </a:p>
+        </p:txBody>
+      </p:sp>
+      <p:sp>
+        <p:nvSpPr>
+          <p:cNvPr id="5" name="TextBox 4"/>
+          <p:cNvSpPr txBox="1"/>
+          <p:nvPr/>
+        </p:nvSpPr>
+        <p:spPr>
+          <a:xfrm>
+            <a:off x="11247120" y="6400800"/>
+            <a:ext cx="548640" cy="365760"/>
+          </a:xfrm>
+          <a:prstGeom prst="rect">
+            <a:avLst/>
+          </a:prstGeom>
+          <a:noFill/>
+        </p:spPr>
+        <p:txBody>
+          <a:bodyPr wrap="square">
+            <a:spAutoFit/>
+          </a:bodyPr>
+          <a:lstStyle/>
+          <a:p>
+            <a:pPr algn="r">
+              <a:spcAft>
+                <a:spcPts val="400"/>
+              </a:spcAft>
+            </a:pPr>
+            <a:r>
+              <a:rPr sz="800" b="0">
+                <a:solidFill>
+                  <a:srgbClr val="666666"/>
+                </a:solidFill>
+                <a:latin typeface="Lato"/>
+              </a:rPr>
+              <a:t>9</a:t>
             </a:r>
           </a:p>
         </p:txBody>
@@ -8857,328 +9467,6 @@
                 <a:latin typeface="Lato"/>
               </a:rPr>
               <a:t> winners average 2.6R and the ten largest are a large share of the total. Never cap them.</a:t>
-            </a:r>
-          </a:p>
-        </p:txBody>
-      </p:sp>
-    </p:spTree>
-  </p:cSld>
-  <p:clrMapOvr>
-    <a:masterClrMapping/>
-  </p:clrMapOvr>
-</p:sld>
-</file>
-
-<file path=ppt/slides/slide9.xml><?xml version="1.0" encoding="utf-8"?>
-<p:sld xmlns:a="http://schemas.openxmlformats.org/drawingml/2006/main" xmlns:p="http://schemas.openxmlformats.org/presentationml/2006/main" xmlns:r="http://schemas.openxmlformats.org/officeDocument/2006/relationships">
-  <p:cSld>
-    <p:spTree>
-      <p:nvGrpSpPr>
-        <p:cNvPr id="1" name=""/>
-        <p:cNvGrpSpPr/>
-        <p:nvPr/>
-      </p:nvGrpSpPr>
-      <p:grpSpPr/>
-      <p:sp>
-        <p:nvSpPr>
-          <p:cNvPr id="2" name="TextBox 1"/>
-          <p:cNvSpPr txBox="1"/>
-          <p:nvPr/>
-        </p:nvSpPr>
-        <p:spPr>
-          <a:xfrm>
-            <a:off x="457200" y="274320"/>
-            <a:ext cx="11247120" cy="640080"/>
-          </a:xfrm>
-          <a:prstGeom prst="rect">
-            <a:avLst/>
-          </a:prstGeom>
-          <a:noFill/>
-        </p:spPr>
-        <p:txBody>
-          <a:bodyPr wrap="square">
-            <a:spAutoFit/>
-          </a:bodyPr>
-          <a:lstStyle/>
-          <a:p>
-            <a:pPr algn="l">
-              <a:spcAft>
-                <a:spcPts val="400"/>
-              </a:spcAft>
-            </a:pPr>
-            <a:r>
-              <a:rPr sz="2600" b="1">
-                <a:solidFill>
-                  <a:srgbClr val="1A1B26"/>
-                </a:solidFill>
-                <a:latin typeface="Lato"/>
-              </a:rPr>
-              <a:t>READING THE TAPE</a:t>
-            </a:r>
-          </a:p>
-        </p:txBody>
-      </p:sp>
-      <p:sp>
-        <p:nvSpPr>
-          <p:cNvPr id="3" name="TextBox 2"/>
-          <p:cNvSpPr txBox="1"/>
-          <p:nvPr/>
-        </p:nvSpPr>
-        <p:spPr>
-          <a:xfrm>
-            <a:off x="457200" y="868680"/>
-            <a:ext cx="11247120" cy="365760"/>
-          </a:xfrm>
-          <a:prstGeom prst="rect">
-            <a:avLst/>
-          </a:prstGeom>
-          <a:noFill/>
-        </p:spPr>
-        <p:txBody>
-          <a:bodyPr wrap="square">
-            <a:spAutoFit/>
-          </a:bodyPr>
-          <a:lstStyle/>
-          <a:p>
-            <a:pPr algn="l">
-              <a:spcAft>
-                <a:spcPts val="400"/>
-              </a:spcAft>
-            </a:pPr>
-            <a:r>
-              <a:rPr sz="1200" b="0">
-                <a:solidFill>
-                  <a:srgbClr val="666666"/>
-                </a:solidFill>
-                <a:latin typeface="Lato"/>
-              </a:rPr>
-              <a:t>What to watch on the cross bar and the bar after it</a:t>
-            </a:r>
-          </a:p>
-        </p:txBody>
-      </p:sp>
-      <p:sp>
-        <p:nvSpPr>
-          <p:cNvPr id="4" name="TextBox 3"/>
-          <p:cNvSpPr txBox="1"/>
-          <p:nvPr/>
-        </p:nvSpPr>
-        <p:spPr>
-          <a:xfrm>
-            <a:off x="457200" y="6400800"/>
-            <a:ext cx="10515600" cy="365760"/>
-          </a:xfrm>
-          <a:prstGeom prst="rect">
-            <a:avLst/>
-          </a:prstGeom>
-          <a:noFill/>
-        </p:spPr>
-        <p:txBody>
-          <a:bodyPr wrap="square">
-            <a:spAutoFit/>
-          </a:bodyPr>
-          <a:lstStyle/>
-          <a:p>
-            <a:pPr algn="l">
-              <a:spcAft>
-                <a:spcPts val="400"/>
-              </a:spcAft>
-            </a:pPr>
-            <a:r>
-              <a:rPr sz="700" b="0">
-                <a:solidFill>
-                  <a:srgbClr val="666666"/>
-                </a:solidFill>
-                <a:latin typeface="Lato"/>
-              </a:rPr>
-              <a:t>Hypothetical backtest results on Massive.com minute data; simulated trades were not executed and do not reflect slippage, commissions or liquidity except where stated. Not investment advice. Trading As Buddies · github.com/TradingAsBuddies/DAS-hotkeys · PlayBook format after SMB Training (not affiliated).</a:t>
-            </a:r>
-          </a:p>
-        </p:txBody>
-      </p:sp>
-      <p:sp>
-        <p:nvSpPr>
-          <p:cNvPr id="5" name="TextBox 4"/>
-          <p:cNvSpPr txBox="1"/>
-          <p:nvPr/>
-        </p:nvSpPr>
-        <p:spPr>
-          <a:xfrm>
-            <a:off x="11247120" y="6400800"/>
-            <a:ext cx="548640" cy="365760"/>
-          </a:xfrm>
-          <a:prstGeom prst="rect">
-            <a:avLst/>
-          </a:prstGeom>
-          <a:noFill/>
-        </p:spPr>
-        <p:txBody>
-          <a:bodyPr wrap="square">
-            <a:spAutoFit/>
-          </a:bodyPr>
-          <a:lstStyle/>
-          <a:p>
-            <a:pPr algn="r">
-              <a:spcAft>
-                <a:spcPts val="400"/>
-              </a:spcAft>
-            </a:pPr>
-            <a:r>
-              <a:rPr sz="800" b="0">
-                <a:solidFill>
-                  <a:srgbClr val="666666"/>
-                </a:solidFill>
-                <a:latin typeface="Lato"/>
-              </a:rPr>
-              <a:t>9</a:t>
-            </a:r>
-          </a:p>
-        </p:txBody>
-      </p:sp>
-      <p:sp>
-        <p:nvSpPr>
-          <p:cNvPr id="6" name="TextBox 5"/>
-          <p:cNvSpPr txBox="1"/>
-          <p:nvPr/>
-        </p:nvSpPr>
-        <p:spPr>
-          <a:xfrm>
-            <a:off x="457200" y="1371600"/>
-            <a:ext cx="11247120" cy="4846320"/>
-          </a:xfrm>
-          <a:prstGeom prst="rect">
-            <a:avLst/>
-          </a:prstGeom>
-          <a:noFill/>
-        </p:spPr>
-        <p:txBody>
-          <a:bodyPr wrap="square">
-            <a:spAutoFit/>
-          </a:bodyPr>
-          <a:lstStyle/>
-          <a:p>
-            <a:pPr>
-              <a:spcAft>
-                <a:spcPts val="800"/>
-              </a:spcAft>
-            </a:pPr>
-            <a:r>
-              <a:rPr sz="1300" b="1">
-                <a:solidFill>
-                  <a:srgbClr val="1A1B26"/>
-                </a:solidFill>
-                <a:latin typeface="Lato"/>
-              </a:rPr>
-              <a:t>•  Volume persistence</a:t>
-            </a:r>
-            <a:r>
-              <a:rPr sz="1300">
-                <a:solidFill>
-                  <a:srgbClr val="1A1B26"/>
-                </a:solidFill>
-                <a:latin typeface="Lato"/>
-              </a:rPr>
-              <a:t> the cross bar's volume must be followed. The 50/2 rule: each of the next two bars prints at least half the cross bar's volume, or exit at that bar's close and do not re-enter on the same signal.</a:t>
-            </a:r>
-          </a:p>
-          <a:p>
-            <a:pPr>
-              <a:spcAft>
-                <a:spcPts val="800"/>
-              </a:spcAft>
-            </a:pPr>
-            <a:r>
-              <a:rPr sz="1300" b="1">
-                <a:solidFill>
-                  <a:srgbClr val="1A1B26"/>
-                </a:solidFill>
-                <a:latin typeface="Lato"/>
-              </a:rPr>
-              <a:t>•  The 09:45 open</a:t>
-            </a:r>
-            <a:r>
-              <a:rPr sz="1300">
-                <a:solidFill>
-                  <a:srgbClr val="1A1B26"/>
-                </a:solidFill>
-                <a:latin typeface="Lato"/>
-              </a:rPr>
-              <a:t> the entry is at the market; a wide spread or a print far from the 09:45 15-minute open is the slippage the backtest does not model.</a:t>
-            </a:r>
-          </a:p>
-          <a:p>
-            <a:pPr>
-              <a:spcAft>
-                <a:spcPts val="800"/>
-              </a:spcAft>
-            </a:pPr>
-            <a:r>
-              <a:rPr sz="1300" b="1">
-                <a:solidFill>
-                  <a:srgbClr val="1A1B26"/>
-                </a:solidFill>
-                <a:latin typeface="Lato"/>
-              </a:rPr>
-              <a:t>•  First bar after entry</a:t>
-            </a:r>
-            <a:r>
-              <a:rPr sz="1300">
-                <a:solidFill>
-                  <a:srgbClr val="1A1B26"/>
-                </a:solidFill>
-                <a:latin typeface="Lato"/>
-              </a:rPr>
-              <a:t> +0.5R moves the stop to breakeven. On the tape that is the bar that has to hold above the 9-EMA; if it closes back below, the scratch is coming.</a:t>
-            </a:r>
-          </a:p>
-          <a:p>
-            <a:pPr>
-              <a:spcAft>
-                <a:spcPts val="800"/>
-              </a:spcAft>
-            </a:pPr>
-            <a:r>
-              <a:rPr sz="1300" b="1">
-                <a:solidFill>
-                  <a:srgbClr val="1A1B26"/>
-                </a:solidFill>
-                <a:latin typeface="Lato"/>
-              </a:rPr>
-              <a:t>•  Level to watch</a:t>
-            </a:r>
-            <a:r>
-              <a:rPr sz="1300">
-                <a:solidFill>
-                  <a:srgbClr val="1A1B26"/>
-                </a:solidFill>
-                <a:latin typeface="Lato"/>
-              </a:rPr>
-              <a:t> the entry price. After breakeven the trade is free; the runner is the one that never revisits it.</a:t>
-            </a:r>
-          </a:p>
-          <a:p>
-            <a:pPr>
-              <a:spcAft>
-                <a:spcPts val="800"/>
-              </a:spcAft>
-            </a:pPr>
-            <a:r>
-              <a:rPr sz="1300" b="1">
-                <a:solidFill>
-                  <a:srgbClr val="1A1B26"/>
-                </a:solidFill>
-                <a:latin typeface="Lato"/>
-              </a:rPr>
-              <a:t>•  Breadth</a:t>
-            </a:r>
-            <a:r>
-              <a:rPr sz="1300">
-                <a:solidFill>
-                  <a:srgbClr val="1A1B26"/>
-                </a:solidFill>
-                <a:latin typeface="Lato"/>
-              </a:rPr>
-              <a:t> $VOLD sign must agree with the side at the cross; $TICK extremes against the trade at entry are a reason to wait one bar, not to skip.</a:t>
             </a:r>
           </a:p>
         </p:txBody>
